--- a/tests/benchmark/architectural_slides/case_016_sustainability_cards/output.pptx
+++ b/tests/benchmark/architectural_slides/case_016_sustainability_cards/output.pptx
@@ -910,7 +910,7 @@
         <p:spPr>
           <a:xfrm>
             <a:off x="640080" y="411480"/>
-            <a:ext cx="7863840" cy="457200"/>
+            <a:ext cx="7863840" cy="601218"/>
           </a:xfrm>
           <a:prstGeom prst="rect">
             <a:avLst/>
@@ -948,8 +948,8 @@
         </p:nvSpPr>
         <p:spPr>
           <a:xfrm>
-            <a:off x="640080" y="982980"/>
-            <a:ext cx="1880235" cy="3352800"/>
+            <a:off x="640080" y="1126998"/>
+            <a:ext cx="1880235" cy="3208782"/>
           </a:xfrm>
           <a:prstGeom prst="rect">
             <a:avLst/>
@@ -987,8 +987,8 @@
         </p:nvSpPr>
         <p:spPr>
           <a:xfrm>
-            <a:off x="2634615" y="982980"/>
-            <a:ext cx="1880235" cy="3352800"/>
+            <a:off x="2634615" y="1126998"/>
+            <a:ext cx="1880235" cy="3208782"/>
           </a:xfrm>
           <a:prstGeom prst="rect">
             <a:avLst/>
@@ -1026,8 +1026,8 @@
         </p:nvSpPr>
         <p:spPr>
           <a:xfrm>
-            <a:off x="4629150" y="982980"/>
-            <a:ext cx="1880235" cy="3352800"/>
+            <a:off x="4629150" y="1126998"/>
+            <a:ext cx="1880235" cy="3208782"/>
           </a:xfrm>
           <a:prstGeom prst="rect">
             <a:avLst/>
@@ -1065,8 +1065,8 @@
         </p:nvSpPr>
         <p:spPr>
           <a:xfrm>
-            <a:off x="6623685" y="982980"/>
-            <a:ext cx="1880235" cy="3352800"/>
+            <a:off x="6623685" y="1126998"/>
+            <a:ext cx="1880235" cy="3208782"/>
           </a:xfrm>
           <a:prstGeom prst="rect">
             <a:avLst/>

--- a/tests/benchmark/architectural_slides/case_016_sustainability_cards/output.pptx
+++ b/tests/benchmark/architectural_slides/case_016_sustainability_cards/output.pptx
@@ -910,7 +910,7 @@
         <p:spPr>
           <a:xfrm>
             <a:off x="640080" y="411480"/>
-            <a:ext cx="7863840" cy="601218"/>
+            <a:ext cx="7863840" cy="621792"/>
           </a:xfrm>
           <a:prstGeom prst="rect">
             <a:avLst/>
@@ -948,8 +948,8 @@
         </p:nvSpPr>
         <p:spPr>
           <a:xfrm>
-            <a:off x="640080" y="1126998"/>
-            <a:ext cx="1880235" cy="3208782"/>
+            <a:off x="640080" y="1147572"/>
+            <a:ext cx="1880235" cy="2913888"/>
           </a:xfrm>
           <a:prstGeom prst="rect">
             <a:avLst/>
@@ -987,8 +987,8 @@
         </p:nvSpPr>
         <p:spPr>
           <a:xfrm>
-            <a:off x="2634615" y="1126998"/>
-            <a:ext cx="1880235" cy="3208782"/>
+            <a:off x="2634615" y="1147572"/>
+            <a:ext cx="1880235" cy="2913888"/>
           </a:xfrm>
           <a:prstGeom prst="rect">
             <a:avLst/>
@@ -1026,8 +1026,8 @@
         </p:nvSpPr>
         <p:spPr>
           <a:xfrm>
-            <a:off x="4629150" y="1126998"/>
-            <a:ext cx="1880235" cy="3208782"/>
+            <a:off x="4629150" y="1147572"/>
+            <a:ext cx="1880235" cy="2913888"/>
           </a:xfrm>
           <a:prstGeom prst="rect">
             <a:avLst/>
@@ -1065,8 +1065,8 @@
         </p:nvSpPr>
         <p:spPr>
           <a:xfrm>
-            <a:off x="6623685" y="1126998"/>
-            <a:ext cx="1880235" cy="3208782"/>
+            <a:off x="6623685" y="1147572"/>
+            <a:ext cx="1880235" cy="2913888"/>
           </a:xfrm>
           <a:prstGeom prst="rect">
             <a:avLst/>

--- a/tests/benchmark/architectural_slides/case_016_sustainability_cards/output.pptx
+++ b/tests/benchmark/architectural_slides/case_016_sustainability_cards/output.pptx
@@ -910,7 +910,7 @@
         <p:spPr>
           <a:xfrm>
             <a:off x="640080" y="411480"/>
-            <a:ext cx="7863840" cy="621792"/>
+            <a:ext cx="7863840" cy="601218"/>
           </a:xfrm>
           <a:prstGeom prst="rect">
             <a:avLst/>
@@ -948,8 +948,8 @@
         </p:nvSpPr>
         <p:spPr>
           <a:xfrm>
-            <a:off x="640080" y="1147572"/>
-            <a:ext cx="1880235" cy="2913888"/>
+            <a:off x="640080" y="1126998"/>
+            <a:ext cx="1880235" cy="2934462"/>
           </a:xfrm>
           <a:prstGeom prst="rect">
             <a:avLst/>
@@ -987,8 +987,8 @@
         </p:nvSpPr>
         <p:spPr>
           <a:xfrm>
-            <a:off x="2634615" y="1147572"/>
-            <a:ext cx="1880235" cy="2913888"/>
+            <a:off x="2634615" y="1126998"/>
+            <a:ext cx="1880235" cy="2934462"/>
           </a:xfrm>
           <a:prstGeom prst="rect">
             <a:avLst/>
@@ -1026,8 +1026,8 @@
         </p:nvSpPr>
         <p:spPr>
           <a:xfrm>
-            <a:off x="4629150" y="1147572"/>
-            <a:ext cx="1880235" cy="2913888"/>
+            <a:off x="4629150" y="1126998"/>
+            <a:ext cx="1880235" cy="2934462"/>
           </a:xfrm>
           <a:prstGeom prst="rect">
             <a:avLst/>
@@ -1065,8 +1065,8 @@
         </p:nvSpPr>
         <p:spPr>
           <a:xfrm>
-            <a:off x="6623685" y="1147572"/>
-            <a:ext cx="1880235" cy="2913888"/>
+            <a:off x="6623685" y="1126998"/>
+            <a:ext cx="1880235" cy="2934462"/>
           </a:xfrm>
           <a:prstGeom prst="rect">
             <a:avLst/>
